--- a/chapter_05/tables/verifying_rainfall_thresholds.pptx
+++ b/chapter_05/tables/verifying_rainfall_thresholds.pptx
@@ -125,12 +125,12 @@
   <pc:docChgLst>
     <pc:chgData name="Fatima Pillosu" userId="a6295d4dc9e22643" providerId="LiveId" clId="{87453732-75AC-4426-B5D3-B7C69C2D4F54}"/>
     <pc:docChg chg="custSel modSld">
-      <pc:chgData name="Fatima Pillosu" userId="a6295d4dc9e22643" providerId="LiveId" clId="{87453732-75AC-4426-B5D3-B7C69C2D4F54}" dt="2026-01-22T12:40:31.254" v="188"/>
+      <pc:chgData name="Fatima Pillosu" userId="a6295d4dc9e22643" providerId="LiveId" clId="{87453732-75AC-4426-B5D3-B7C69C2D4F54}" dt="2026-01-22T21:48:42.367" v="194" actId="20577"/>
       <pc:docMkLst>
         <pc:docMk/>
       </pc:docMkLst>
       <pc:sldChg chg="addSp delSp modSp mod">
-        <pc:chgData name="Fatima Pillosu" userId="a6295d4dc9e22643" providerId="LiveId" clId="{87453732-75AC-4426-B5D3-B7C69C2D4F54}" dt="2026-01-22T12:40:31.254" v="188"/>
+        <pc:chgData name="Fatima Pillosu" userId="a6295d4dc9e22643" providerId="LiveId" clId="{87453732-75AC-4426-B5D3-B7C69C2D4F54}" dt="2026-01-22T21:48:42.367" v="194" actId="20577"/>
         <pc:sldMkLst>
           <pc:docMk/>
           <pc:sldMk cId="3020345181" sldId="257"/>
@@ -159,8 +159,8 @@
             <ac:graphicFrameMk id="4" creationId="{15623DAB-A4E1-DF1C-9B96-E2C1CE9DE49A}"/>
           </ac:graphicFrameMkLst>
         </pc:graphicFrameChg>
-        <pc:graphicFrameChg chg="add mod">
-          <ac:chgData name="Fatima Pillosu" userId="a6295d4dc9e22643" providerId="LiveId" clId="{87453732-75AC-4426-B5D3-B7C69C2D4F54}" dt="2026-01-22T12:40:31.254" v="188"/>
+        <pc:graphicFrameChg chg="add mod modGraphic">
+          <ac:chgData name="Fatima Pillosu" userId="a6295d4dc9e22643" providerId="LiveId" clId="{87453732-75AC-4426-B5D3-B7C69C2D4F54}" dt="2026-01-22T21:48:42.367" v="194" actId="20577"/>
           <ac:graphicFrameMkLst>
             <pc:docMk/>
             <pc:sldMk cId="3020345181" sldId="257"/>
@@ -3049,7 +3049,7 @@
           <p:nvPr>
             <p:extLst>
               <p:ext uri="{D42A27DB-BD31-4B8C-83A1-F6EECF244321}">
-                <p14:modId xmlns:p14="http://schemas.microsoft.com/office/powerpoint/2010/main" val="3782856996"/>
+                <p14:modId xmlns:p14="http://schemas.microsoft.com/office/powerpoint/2010/main" val="2062477563"/>
               </p:ext>
             </p:extLst>
           </p:nvPr>
@@ -3392,7 +3392,7 @@
                           </a:solidFill>
                           <a:latin typeface="Avenir Next LT Pro" panose="020B0504020202020204" pitchFamily="34" charset="0"/>
                         </a:rPr>
-                        <a:t>5</a:t>
+                        <a:t>5*</a:t>
                       </a:r>
                     </a:p>
                   </a:txBody>
@@ -3418,7 +3418,7 @@
                           </a:solidFill>
                           <a:latin typeface="Avenir Next LT Pro" panose="020B0504020202020204" pitchFamily="34" charset="0"/>
                         </a:rPr>
-                        <a:t>10</a:t>
+                        <a:t>10*</a:t>
                       </a:r>
                     </a:p>
                   </a:txBody>
@@ -3444,7 +3444,7 @@
                           </a:solidFill>
                           <a:latin typeface="Avenir Next LT Pro" panose="020B0504020202020204" pitchFamily="34" charset="0"/>
                         </a:rPr>
-                        <a:t>20</a:t>
+                        <a:t>20*</a:t>
                       </a:r>
                     </a:p>
                   </a:txBody>
@@ -3487,7 +3487,7 @@
                     <a:p>
                       <a:pPr algn="ctr"/>
                       <a:r>
-                        <a:rPr lang="en-GB" sz="800" i="0" dirty="0">
+                        <a:rPr lang="en-GB" sz="800" i="0">
                           <a:solidFill>
                             <a:schemeClr val="tx1">
                               <a:lumMod val="95000"/>
@@ -3496,8 +3496,17 @@
                           </a:solidFill>
                           <a:latin typeface="Avenir Next LT Pro" panose="020B0504020202020204" pitchFamily="34" charset="0"/>
                         </a:rPr>
-                        <a:t>100</a:t>
+                        <a:t>100*</a:t>
                       </a:r>
+                      <a:endParaRPr lang="en-GB" sz="800" i="0" dirty="0">
+                        <a:solidFill>
+                          <a:schemeClr val="tx1">
+                            <a:lumMod val="95000"/>
+                            <a:lumOff val="5000"/>
+                          </a:schemeClr>
+                        </a:solidFill>
+                        <a:latin typeface="Avenir Next LT Pro" panose="020B0504020202020204" pitchFamily="34" charset="0"/>
+                      </a:endParaRPr>
                     </a:p>
                   </a:txBody>
                   <a:tcPr anchor="ctr">
